--- a/Presentation/Team7AIML07_final.pptx
+++ b/Presentation/Team7AIML07_final.pptx
@@ -215,7 +215,7 @@
           <a:p>
             <a:fld id="{126BCFA6-AEBD-4DD0-86FD-77DD48DA5BD0}" type="datetimeFigureOut">
               <a:rPr lang="en-US" smtClean="0"/>
-              <a:t>7/12/2026</a:t>
+              <a:t>7/14/2026</a:t>
             </a:fld>
             <a:endParaRPr lang="en-US"/>
           </a:p>
@@ -935,7 +935,7 @@
           <a:p>
             <a:fld id="{9A627D40-C749-418C-A4F5-C4EE69FA3AD0}" type="datetimeFigureOut">
               <a:rPr lang="en-US" smtClean="0"/>
-              <a:t>7/12/2026</a:t>
+              <a:t>7/14/2026</a:t>
             </a:fld>
             <a:endParaRPr lang="en-US"/>
           </a:p>
@@ -1105,7 +1105,7 @@
           <a:p>
             <a:fld id="{9A627D40-C749-418C-A4F5-C4EE69FA3AD0}" type="datetimeFigureOut">
               <a:rPr lang="en-US" smtClean="0"/>
-              <a:t>7/12/2026</a:t>
+              <a:t>7/14/2026</a:t>
             </a:fld>
             <a:endParaRPr lang="en-US"/>
           </a:p>
@@ -1285,7 +1285,7 @@
           <a:p>
             <a:fld id="{9A627D40-C749-418C-A4F5-C4EE69FA3AD0}" type="datetimeFigureOut">
               <a:rPr lang="en-US" smtClean="0"/>
-              <a:t>7/12/2026</a:t>
+              <a:t>7/14/2026</a:t>
             </a:fld>
             <a:endParaRPr lang="en-US"/>
           </a:p>
@@ -1689,7 +1689,7 @@
           <a:p>
             <a:fld id="{9A627D40-C749-418C-A4F5-C4EE69FA3AD0}" type="datetimeFigureOut">
               <a:rPr lang="en-US" smtClean="0"/>
-              <a:t>7/12/2026</a:t>
+              <a:t>7/14/2026</a:t>
             </a:fld>
             <a:endParaRPr lang="en-US"/>
           </a:p>
@@ -1988,7 +1988,7 @@
           <a:p>
             <a:fld id="{9A627D40-C749-418C-A4F5-C4EE69FA3AD0}" type="datetimeFigureOut">
               <a:rPr lang="en-US" smtClean="0"/>
-              <a:t>7/12/2026</a:t>
+              <a:t>7/14/2026</a:t>
             </a:fld>
             <a:endParaRPr lang="en-US"/>
           </a:p>
@@ -2234,7 +2234,7 @@
           <a:p>
             <a:fld id="{9A627D40-C749-418C-A4F5-C4EE69FA3AD0}" type="datetimeFigureOut">
               <a:rPr lang="en-US" smtClean="0"/>
-              <a:t>7/12/2026</a:t>
+              <a:t>7/14/2026</a:t>
             </a:fld>
             <a:endParaRPr lang="en-US"/>
           </a:p>
@@ -2466,7 +2466,7 @@
           <a:p>
             <a:fld id="{9A627D40-C749-418C-A4F5-C4EE69FA3AD0}" type="datetimeFigureOut">
               <a:rPr lang="en-US" smtClean="0"/>
-              <a:t>7/12/2026</a:t>
+              <a:t>7/14/2026</a:t>
             </a:fld>
             <a:endParaRPr lang="en-US"/>
           </a:p>
@@ -2833,7 +2833,7 @@
           <a:p>
             <a:fld id="{9A627D40-C749-418C-A4F5-C4EE69FA3AD0}" type="datetimeFigureOut">
               <a:rPr lang="en-US" smtClean="0"/>
-              <a:t>7/12/2026</a:t>
+              <a:t>7/14/2026</a:t>
             </a:fld>
             <a:endParaRPr lang="en-US"/>
           </a:p>
@@ -2951,7 +2951,7 @@
           <a:p>
             <a:fld id="{9A627D40-C749-418C-A4F5-C4EE69FA3AD0}" type="datetimeFigureOut">
               <a:rPr lang="en-US" smtClean="0"/>
-              <a:t>7/12/2026</a:t>
+              <a:t>7/14/2026</a:t>
             </a:fld>
             <a:endParaRPr lang="en-US"/>
           </a:p>
@@ -3046,7 +3046,7 @@
           <a:p>
             <a:fld id="{9A627D40-C749-418C-A4F5-C4EE69FA3AD0}" type="datetimeFigureOut">
               <a:rPr lang="en-US" smtClean="0"/>
-              <a:t>7/12/2026</a:t>
+              <a:t>7/14/2026</a:t>
             </a:fld>
             <a:endParaRPr lang="en-US"/>
           </a:p>
@@ -3323,7 +3323,7 @@
           <a:p>
             <a:fld id="{9A627D40-C749-418C-A4F5-C4EE69FA3AD0}" type="datetimeFigureOut">
               <a:rPr lang="en-US" smtClean="0"/>
-              <a:t>7/12/2026</a:t>
+              <a:t>7/14/2026</a:t>
             </a:fld>
             <a:endParaRPr lang="en-US"/>
           </a:p>
@@ -3580,7 +3580,7 @@
           <a:p>
             <a:fld id="{9A627D40-C749-418C-A4F5-C4EE69FA3AD0}" type="datetimeFigureOut">
               <a:rPr lang="en-US" smtClean="0"/>
-              <a:t>7/12/2026</a:t>
+              <a:t>7/14/2026</a:t>
             </a:fld>
             <a:endParaRPr lang="en-US"/>
           </a:p>
@@ -3793,7 +3793,7 @@
           <a:p>
             <a:fld id="{9A627D40-C749-418C-A4F5-C4EE69FA3AD0}" type="datetimeFigureOut">
               <a:rPr lang="en-US" smtClean="0"/>
-              <a:t>7/12/2026</a:t>
+              <a:t>7/14/2026</a:t>
             </a:fld>
             <a:endParaRPr lang="en-US"/>
           </a:p>
@@ -4939,9 +4939,9 @@
         <p:grpSpPr>
           <a:xfrm>
             <a:off x="3231351" y="4286968"/>
-            <a:ext cx="2391390" cy="669415"/>
+            <a:ext cx="2391390" cy="646332"/>
             <a:chOff x="3139699" y="4295282"/>
-            <a:chExt cx="2391390" cy="669415"/>
+            <a:chExt cx="2391390" cy="646332"/>
           </a:xfrm>
         </p:grpSpPr>
         <p:sp>
@@ -5003,7 +5003,7 @@
           <p:spPr>
             <a:xfrm>
               <a:off x="3139699" y="4456866"/>
-              <a:ext cx="2391390" cy="507831"/>
+              <a:ext cx="2391390" cy="484748"/>
             </a:xfrm>
             <a:prstGeom prst="rect">
               <a:avLst/>
@@ -5038,31 +5038,7 @@
                   <a:cs typeface="Aileron Bold"/>
                   <a:sym typeface="Aileron Bold"/>
                 </a:rPr>
-                <a:t>https://github.com/rajansharma630/</a:t>
-              </a:r>
-              <a:r>
-                <a:rPr lang="en-US" sz="1200" b="1" dirty="0">
-                  <a:solidFill>
-                    <a:srgbClr val="0D358D"/>
-                  </a:solidFill>
-                  <a:latin typeface="+mj-lt"/>
-                  <a:ea typeface="Aileron Bold"/>
-                  <a:cs typeface="Aileron Bold"/>
-                  <a:sym typeface="Aileron Bold"/>
-                </a:rPr>
-                <a:t>project</a:t>
-              </a:r>
-              <a:r>
-                <a:rPr lang="en-US" sz="1050" b="1" dirty="0">
-                  <a:solidFill>
-                    <a:srgbClr val="0D358D"/>
-                  </a:solidFill>
-                  <a:latin typeface="+mj-lt"/>
-                  <a:ea typeface="Aileron Bold"/>
-                  <a:cs typeface="Aileron Bold"/>
-                  <a:sym typeface="Aileron Bold"/>
-                </a:rPr>
-                <a:t>_for_internship.git</a:t>
+                <a:t>https://github.com/Akarsh077/FinalProject7.git</a:t>
               </a:r>
             </a:p>
           </p:txBody>
